--- a/~sasano/lecture/fpl/26/fpl3.pptx
+++ b/~sasano/lecture/fpl/26/fpl3.pptx
@@ -231,7 +231,7 @@
             <a:fld id="{F61AC52B-4C5B-4329-B70A-EF9B7E71F231}" type="datetimeFigureOut">
               <a:rPr kumimoji="1" lang="ja-JP" altLang="en-US" smtClean="0"/>
               <a:pPr/>
-              <a:t>2025/10/20</a:t>
+              <a:t>2026/9/30</a:t>
             </a:fld>
             <a:endParaRPr kumimoji="1" lang="ja-JP" altLang="en-US"/>
           </a:p>
@@ -965,7 +965,7 @@
             <a:fld id="{E90ED720-0104-4369-84BC-D37694168613}" type="datetimeFigureOut">
               <a:rPr kumimoji="1" lang="ja-JP" altLang="en-US" smtClean="0"/>
               <a:pPr/>
-              <a:t>2025/10/20</a:t>
+              <a:t>2026/9/30</a:t>
             </a:fld>
             <a:endParaRPr kumimoji="1" lang="ja-JP" altLang="en-US"/>
           </a:p>
@@ -1162,7 +1162,7 @@
             <a:fld id="{E90ED720-0104-4369-84BC-D37694168613}" type="datetimeFigureOut">
               <a:rPr kumimoji="1" lang="ja-JP" altLang="en-US" smtClean="0"/>
               <a:pPr/>
-              <a:t>2025/10/20</a:t>
+              <a:t>2026/9/30</a:t>
             </a:fld>
             <a:endParaRPr kumimoji="1" lang="ja-JP" altLang="en-US"/>
           </a:p>
@@ -1369,7 +1369,7 @@
             <a:fld id="{E90ED720-0104-4369-84BC-D37694168613}" type="datetimeFigureOut">
               <a:rPr kumimoji="1" lang="ja-JP" altLang="en-US" smtClean="0"/>
               <a:pPr/>
-              <a:t>2025/10/20</a:t>
+              <a:t>2026/9/30</a:t>
             </a:fld>
             <a:endParaRPr kumimoji="1" lang="ja-JP" altLang="en-US"/>
           </a:p>
@@ -1566,7 +1566,7 @@
             <a:fld id="{E90ED720-0104-4369-84BC-D37694168613}" type="datetimeFigureOut">
               <a:rPr kumimoji="1" lang="ja-JP" altLang="en-US" smtClean="0"/>
               <a:pPr/>
-              <a:t>2025/10/20</a:t>
+              <a:t>2026/9/30</a:t>
             </a:fld>
             <a:endParaRPr kumimoji="1" lang="ja-JP" altLang="en-US"/>
           </a:p>
@@ -1808,7 +1808,7 @@
             <a:fld id="{E90ED720-0104-4369-84BC-D37694168613}" type="datetimeFigureOut">
               <a:rPr kumimoji="1" lang="ja-JP" altLang="en-US" smtClean="0"/>
               <a:pPr/>
-              <a:t>2025/10/20</a:t>
+              <a:t>2026/9/30</a:t>
             </a:fld>
             <a:endParaRPr kumimoji="1" lang="ja-JP" altLang="en-US"/>
           </a:p>
@@ -2154,7 +2154,7 @@
             <a:fld id="{E90ED720-0104-4369-84BC-D37694168613}" type="datetimeFigureOut">
               <a:rPr kumimoji="1" lang="ja-JP" altLang="en-US" smtClean="0"/>
               <a:pPr/>
-              <a:t>2025/10/20</a:t>
+              <a:t>2026/9/30</a:t>
             </a:fld>
             <a:endParaRPr kumimoji="1" lang="ja-JP" altLang="en-US"/>
           </a:p>
@@ -2634,7 +2634,7 @@
             <a:fld id="{E90ED720-0104-4369-84BC-D37694168613}" type="datetimeFigureOut">
               <a:rPr kumimoji="1" lang="ja-JP" altLang="en-US" smtClean="0"/>
               <a:pPr/>
-              <a:t>2025/10/20</a:t>
+              <a:t>2026/9/30</a:t>
             </a:fld>
             <a:endParaRPr kumimoji="1" lang="ja-JP" altLang="en-US"/>
           </a:p>
@@ -2748,7 +2748,7 @@
             <a:fld id="{E90ED720-0104-4369-84BC-D37694168613}" type="datetimeFigureOut">
               <a:rPr kumimoji="1" lang="ja-JP" altLang="en-US" smtClean="0"/>
               <a:pPr/>
-              <a:t>2025/10/20</a:t>
+              <a:t>2026/9/30</a:t>
             </a:fld>
             <a:endParaRPr kumimoji="1" lang="ja-JP" altLang="en-US"/>
           </a:p>
@@ -2840,7 +2840,7 @@
             <a:fld id="{E90ED720-0104-4369-84BC-D37694168613}" type="datetimeFigureOut">
               <a:rPr kumimoji="1" lang="ja-JP" altLang="en-US" smtClean="0"/>
               <a:pPr/>
-              <a:t>2025/10/20</a:t>
+              <a:t>2026/9/30</a:t>
             </a:fld>
             <a:endParaRPr kumimoji="1" lang="ja-JP" altLang="en-US"/>
           </a:p>
@@ -3144,7 +3144,7 @@
             <a:fld id="{E90ED720-0104-4369-84BC-D37694168613}" type="datetimeFigureOut">
               <a:rPr kumimoji="1" lang="ja-JP" altLang="en-US" smtClean="0"/>
               <a:pPr/>
-              <a:t>2025/10/20</a:t>
+              <a:t>2026/9/30</a:t>
             </a:fld>
             <a:endParaRPr kumimoji="1" lang="ja-JP" altLang="en-US"/>
           </a:p>
@@ -3393,7 +3393,7 @@
             <a:fld id="{E90ED720-0104-4369-84BC-D37694168613}" type="datetimeFigureOut">
               <a:rPr kumimoji="1" lang="ja-JP" altLang="en-US" smtClean="0"/>
               <a:pPr/>
-              <a:t>2025/10/20</a:t>
+              <a:t>2026/9/30</a:t>
             </a:fld>
             <a:endParaRPr kumimoji="1" lang="ja-JP" altLang="en-US"/>
           </a:p>
@@ -3633,7 +3633,7 @@
             <a:fld id="{E90ED720-0104-4369-84BC-D37694168613}" type="datetimeFigureOut">
               <a:rPr kumimoji="1" lang="ja-JP" altLang="en-US" smtClean="0"/>
               <a:pPr/>
-              <a:t>2025/10/20</a:t>
+              <a:t>2026/9/30</a:t>
             </a:fld>
             <a:endParaRPr kumimoji="1" lang="ja-JP" altLang="en-US"/>
           </a:p>
@@ -4073,56 +4073,6 @@
               <a:t>Hoare logic</a:t>
             </a:r>
             <a:endParaRPr kumimoji="1" lang="ja-JP" altLang="en-US" sz="3600" dirty="0"/>
-          </a:p>
-        </p:txBody>
-      </p:sp>
-      <p:sp>
-        <p:nvSpPr>
-          <p:cNvPr id="5" name="テキスト ボックス 4"/>
-          <p:cNvSpPr txBox="1"/>
-          <p:nvPr/>
-        </p:nvSpPr>
-        <p:spPr>
-          <a:xfrm>
-            <a:off x="740366" y="4578050"/>
-            <a:ext cx="7776863" cy="1077218"/>
-          </a:xfrm>
-          <a:prstGeom prst="rect">
-            <a:avLst/>
-          </a:prstGeom>
-          <a:noFill/>
-        </p:spPr>
-        <p:txBody>
-          <a:bodyPr wrap="square" rtlCol="0">
-            <a:spAutoFit/>
-          </a:bodyPr>
-          <a:lstStyle/>
-          <a:p>
-            <a:pPr algn="ctr"/>
-            <a:r>
-              <a:rPr kumimoji="1" lang="en-US" altLang="ja-JP" sz="3200" dirty="0"/>
-              <a:t>Department of </a:t>
-            </a:r>
-          </a:p>
-          <a:p>
-            <a:pPr algn="ctr"/>
-            <a:r>
-              <a:rPr lang="en-US" altLang="ja-JP" sz="3200" dirty="0"/>
-              <a:t>Computer</a:t>
-            </a:r>
-            <a:r>
-              <a:rPr kumimoji="1" lang="en-US" altLang="ja-JP" sz="3200" dirty="0"/>
-              <a:t> Science and </a:t>
-            </a:r>
-            <a:r>
-              <a:rPr lang="en-US" altLang="ja-JP" sz="3200" dirty="0"/>
-              <a:t>Engineering</a:t>
-            </a:r>
-            <a:r>
-              <a:rPr kumimoji="1" lang="en-US" altLang="ja-JP" sz="3200" dirty="0"/>
-              <a:t> </a:t>
-            </a:r>
-            <a:endParaRPr kumimoji="1" lang="ja-JP" altLang="en-US" sz="3200" dirty="0"/>
           </a:p>
         </p:txBody>
       </p:sp>
